--- a/atelier/atelier-s03-open-studio-countdown.pptx
+++ b/atelier/atelier-s03-open-studio-countdown.pptx
@@ -4646,7 +4646,7 @@
         <p:spPr>
           <a:xfrm>
             <a:off x="762000" y="7640836"/>
-            <a:ext cx="14401800" cy="485775"/>
+            <a:ext cx="14401800" cy="385465"/>
           </a:xfrm>
           <a:prstGeom prst="rect">
             <a:avLst/>
@@ -4657,7 +4657,11 @@
           <a:bodyPr wrap="none" anchor="t" lIns="0" rIns="0" tIns="0" bIns="0"/>
           <a:lstStyle/>
           <a:p>
-            <a:pPr algn="l"/>
+            <a:pPr algn="l">
+              <a:lnSpc>
+                <a:spcPct val="92000"/>
+              </a:lnSpc>
+            </a:pPr>
             <a:r>
               <a:rPr sz="3300" i="1" b="0">
                 <a:solidFill>
@@ -4680,7 +4684,7 @@
         </p:nvSpPr>
         <p:spPr>
           <a:xfrm>
-            <a:off x="762000" y="8202811"/>
+            <a:off x="762000" y="8102501"/>
             <a:ext cx="14401800" cy="171450"/>
           </a:xfrm>
           <a:prstGeom prst="rect">
@@ -4715,8 +4719,8 @@
         </p:nvSpPr>
         <p:spPr>
           <a:xfrm>
-            <a:off x="762000" y="8545711"/>
-            <a:ext cx="14401800" cy="304800"/>
+            <a:off x="762000" y="8445401"/>
+            <a:ext cx="14401800" cy="245269"/>
           </a:xfrm>
           <a:prstGeom prst="rect">
             <a:avLst/>
@@ -4727,7 +4731,11 @@
           <a:bodyPr wrap="none" anchor="t" lIns="0" rIns="0" tIns="0" bIns="0"/>
           <a:lstStyle/>
           <a:p>
-            <a:pPr algn="l"/>
+            <a:pPr algn="l">
+              <a:lnSpc>
+                <a:spcPct val="92000"/>
+              </a:lnSpc>
+            </a:pPr>
             <a:r>
               <a:rPr sz="2100" i="1" b="0">
                 <a:solidFill>

--- a/atelier/atelier-s03-open-studio-countdown.pptx
+++ b/atelier/atelier-s03-open-studio-countdown.pptx
@@ -3141,7 +3141,7 @@
         <p:spPr>
           <a:xfrm>
             <a:off x="762000" y="762000"/>
-            <a:ext cx="457200" cy="9525"/>
+            <a:ext cx="552450" cy="9525"/>
           </a:xfrm>
           <a:prstGeom prst="rect">
             <a:avLst/>
@@ -3184,8 +3184,8 @@
         </p:nvSpPr>
         <p:spPr>
           <a:xfrm>
-            <a:off x="762000" y="1209675"/>
-            <a:ext cx="457200" cy="9525"/>
+            <a:off x="762000" y="1304925"/>
+            <a:ext cx="552450" cy="9525"/>
           </a:xfrm>
           <a:prstGeom prst="rect">
             <a:avLst/>
@@ -3229,7 +3229,7 @@
         <p:spPr>
           <a:xfrm>
             <a:off x="762000" y="762000"/>
-            <a:ext cx="9525" cy="457200"/>
+            <a:ext cx="9525" cy="552450"/>
           </a:xfrm>
           <a:prstGeom prst="rect">
             <a:avLst/>
@@ -3272,8 +3272,8 @@
         </p:nvSpPr>
         <p:spPr>
           <a:xfrm>
-            <a:off x="1209675" y="762000"/>
-            <a:ext cx="9525" cy="457200"/>
+            <a:off x="1304925" y="762000"/>
+            <a:ext cx="9525" cy="552450"/>
           </a:xfrm>
           <a:prstGeom prst="rect">
             <a:avLst/>
@@ -3316,8 +3316,8 @@
         </p:nvSpPr>
         <p:spPr>
           <a:xfrm>
-            <a:off x="762000" y="4678561"/>
-            <a:ext cx="2806601" cy="1838325"/>
+            <a:off x="762000" y="4891980"/>
+            <a:ext cx="2793950" cy="2457450"/>
           </a:xfrm>
           <a:prstGeom prst="rect">
             <a:avLst/>
@@ -3360,8 +3360,8 @@
         </p:nvSpPr>
         <p:spPr>
           <a:xfrm>
-            <a:off x="762000" y="4678561"/>
-            <a:ext cx="2806601" cy="9525"/>
+            <a:off x="762000" y="4891980"/>
+            <a:ext cx="2793950" cy="9525"/>
           </a:xfrm>
           <a:prstGeom prst="rect">
             <a:avLst/>
@@ -3404,8 +3404,8 @@
         </p:nvSpPr>
         <p:spPr>
           <a:xfrm>
-            <a:off x="762000" y="6507361"/>
-            <a:ext cx="2806601" cy="9525"/>
+            <a:off x="762000" y="7339905"/>
+            <a:ext cx="2793950" cy="9525"/>
           </a:xfrm>
           <a:prstGeom prst="rect">
             <a:avLst/>
@@ -3448,8 +3448,8 @@
         </p:nvSpPr>
         <p:spPr>
           <a:xfrm>
-            <a:off x="762000" y="4678561"/>
-            <a:ext cx="9525" cy="1838325"/>
+            <a:off x="762000" y="4891980"/>
+            <a:ext cx="9525" cy="2457450"/>
           </a:xfrm>
           <a:prstGeom prst="rect">
             <a:avLst/>
@@ -3492,8 +3492,8 @@
         </p:nvSpPr>
         <p:spPr>
           <a:xfrm>
-            <a:off x="3559076" y="4678561"/>
-            <a:ext cx="9525" cy="1838325"/>
+            <a:off x="3546425" y="4891980"/>
+            <a:ext cx="9525" cy="2457450"/>
           </a:xfrm>
           <a:prstGeom prst="rect">
             <a:avLst/>
@@ -3536,8 +3536,8 @@
         </p:nvSpPr>
         <p:spPr>
           <a:xfrm>
-            <a:off x="3740051" y="4678561"/>
-            <a:ext cx="2806750" cy="1838325"/>
+            <a:off x="3746450" y="4891980"/>
+            <a:ext cx="2794099" cy="2457450"/>
           </a:xfrm>
           <a:prstGeom prst="rect">
             <a:avLst/>
@@ -3580,8 +3580,8 @@
         </p:nvSpPr>
         <p:spPr>
           <a:xfrm>
-            <a:off x="3740051" y="4678561"/>
-            <a:ext cx="2806750" cy="9525"/>
+            <a:off x="3746450" y="4891980"/>
+            <a:ext cx="2794099" cy="9525"/>
           </a:xfrm>
           <a:prstGeom prst="rect">
             <a:avLst/>
@@ -3624,8 +3624,8 @@
         </p:nvSpPr>
         <p:spPr>
           <a:xfrm>
-            <a:off x="3740051" y="6507361"/>
-            <a:ext cx="2806750" cy="9525"/>
+            <a:off x="3746450" y="7339905"/>
+            <a:ext cx="2794099" cy="9525"/>
           </a:xfrm>
           <a:prstGeom prst="rect">
             <a:avLst/>
@@ -3668,8 +3668,8 @@
         </p:nvSpPr>
         <p:spPr>
           <a:xfrm>
-            <a:off x="3740051" y="4678561"/>
-            <a:ext cx="9525" cy="1838325"/>
+            <a:off x="3746450" y="4891980"/>
+            <a:ext cx="9525" cy="2457450"/>
           </a:xfrm>
           <a:prstGeom prst="rect">
             <a:avLst/>
@@ -3712,8 +3712,8 @@
         </p:nvSpPr>
         <p:spPr>
           <a:xfrm>
-            <a:off x="6537275" y="4678561"/>
-            <a:ext cx="9525" cy="1838325"/>
+            <a:off x="6531025" y="4891980"/>
+            <a:ext cx="9525" cy="2457450"/>
           </a:xfrm>
           <a:prstGeom prst="rect">
             <a:avLst/>
@@ -3756,8 +3756,8 @@
         </p:nvSpPr>
         <p:spPr>
           <a:xfrm>
-            <a:off x="6718250" y="4678561"/>
-            <a:ext cx="2806750" cy="1838325"/>
+            <a:off x="6731050" y="4891980"/>
+            <a:ext cx="2793950" cy="2457450"/>
           </a:xfrm>
           <a:prstGeom prst="rect">
             <a:avLst/>
@@ -3800,8 +3800,8 @@
         </p:nvSpPr>
         <p:spPr>
           <a:xfrm>
-            <a:off x="6718250" y="4678561"/>
-            <a:ext cx="2806750" cy="9525"/>
+            <a:off x="6731050" y="4891980"/>
+            <a:ext cx="2793950" cy="9525"/>
           </a:xfrm>
           <a:prstGeom prst="rect">
             <a:avLst/>
@@ -3844,8 +3844,8 @@
         </p:nvSpPr>
         <p:spPr>
           <a:xfrm>
-            <a:off x="6718250" y="6507361"/>
-            <a:ext cx="2806750" cy="9525"/>
+            <a:off x="6731050" y="7339905"/>
+            <a:ext cx="2793950" cy="9525"/>
           </a:xfrm>
           <a:prstGeom prst="rect">
             <a:avLst/>
@@ -3888,8 +3888,8 @@
         </p:nvSpPr>
         <p:spPr>
           <a:xfrm>
-            <a:off x="6718250" y="4678561"/>
-            <a:ext cx="9525" cy="1838325"/>
+            <a:off x="6731050" y="4891980"/>
+            <a:ext cx="9525" cy="2457450"/>
           </a:xfrm>
           <a:prstGeom prst="rect">
             <a:avLst/>
@@ -3932,8 +3932,8 @@
         </p:nvSpPr>
         <p:spPr>
           <a:xfrm>
-            <a:off x="9515475" y="4678561"/>
-            <a:ext cx="9525" cy="1838325"/>
+            <a:off x="9515475" y="4891980"/>
+            <a:ext cx="9525" cy="2457450"/>
           </a:xfrm>
           <a:prstGeom prst="rect">
             <a:avLst/>
@@ -3976,7 +3976,7 @@
         </p:nvSpPr>
         <p:spPr>
           <a:xfrm>
-            <a:off x="762000" y="7088386"/>
+            <a:off x="762000" y="8111430"/>
             <a:ext cx="8763000" cy="9525"/>
           </a:xfrm>
           <a:prstGeom prst="rect">
@@ -4020,7 +4020,7 @@
         </p:nvSpPr>
         <p:spPr>
           <a:xfrm>
-            <a:off x="762000" y="15735300"/>
+            <a:off x="762000" y="15782925"/>
             <a:ext cx="8763000" cy="9525"/>
           </a:xfrm>
           <a:prstGeom prst="rect">
@@ -4064,7 +4064,7 @@
         </p:nvSpPr>
         <p:spPr>
           <a:xfrm>
-            <a:off x="762000" y="16373475"/>
+            <a:off x="762000" y="16659225"/>
             <a:ext cx="8763000" cy="9525"/>
           </a:xfrm>
           <a:prstGeom prst="rect">
@@ -4108,8 +4108,8 @@
         </p:nvSpPr>
         <p:spPr>
           <a:xfrm>
-            <a:off x="762000" y="15735300"/>
-            <a:ext cx="9525" cy="647700"/>
+            <a:off x="762000" y="15782925"/>
+            <a:ext cx="9525" cy="885825"/>
           </a:xfrm>
           <a:prstGeom prst="rect">
             <a:avLst/>
@@ -4152,8 +4152,8 @@
         </p:nvSpPr>
         <p:spPr>
           <a:xfrm>
-            <a:off x="9515475" y="15735300"/>
-            <a:ext cx="9525" cy="647700"/>
+            <a:off x="9515475" y="15782925"/>
+            <a:ext cx="9525" cy="885825"/>
           </a:xfrm>
           <a:prstGeom prst="rect">
             <a:avLst/>
@@ -4196,8 +4196,8 @@
         </p:nvSpPr>
         <p:spPr>
           <a:xfrm>
-            <a:off x="1024416" y="16012004"/>
-            <a:ext cx="94293" cy="94292"/>
+            <a:off x="1077621" y="16165220"/>
+            <a:ext cx="121233" cy="121234"/>
           </a:xfrm>
           <a:prstGeom prst="rect">
             <a:avLst/>
@@ -4240,8 +4240,8 @@
         </p:nvSpPr>
         <p:spPr>
           <a:xfrm>
-            <a:off x="862608" y="909638"/>
-            <a:ext cx="790575" cy="161925"/>
+            <a:off x="880170" y="938212"/>
+            <a:ext cx="886778" cy="200025"/>
           </a:xfrm>
           <a:prstGeom prst="rect">
             <a:avLst/>
@@ -4258,7 +4258,7 @@
               </a:lnSpc>
             </a:pPr>
             <a:r>
-              <a:rPr sz="1275" i="0" b="1" spc="51">
+              <a:rPr sz="1575" i="0" b="1" spc="63">
                 <a:solidFill>
                   <a:srgbClr val="1A1714"/>
                 </a:solidFill>
@@ -4279,8 +4279,8 @@
         </p:nvSpPr>
         <p:spPr>
           <a:xfrm>
-            <a:off x="7969895" y="938212"/>
-            <a:ext cx="2869168" cy="104775"/>
+            <a:off x="7129611" y="952500"/>
+            <a:ext cx="4213622" cy="171450"/>
           </a:xfrm>
           <a:prstGeom prst="rect">
             <a:avLst/>
@@ -4293,7 +4293,7 @@
           <a:p>
             <a:pPr algn="l"/>
             <a:r>
-              <a:rPr sz="750" i="0" b="0" spc="105">
+              <a:rPr sz="1125" i="0" b="0" spc="180">
                 <a:solidFill>
                   <a:srgbClr val="8A7E6F"/>
                 </a:solidFill>
@@ -4314,8 +4314,8 @@
         </p:nvSpPr>
         <p:spPr>
           <a:xfrm>
-            <a:off x="762000" y="2857500"/>
-            <a:ext cx="14401800" cy="133350"/>
+            <a:off x="762000" y="2667000"/>
+            <a:ext cx="14401800" cy="228600"/>
           </a:xfrm>
           <a:prstGeom prst="rect">
             <a:avLst/>
@@ -4328,7 +4328,7 @@
           <a:p>
             <a:pPr algn="l"/>
             <a:r>
-              <a:rPr sz="900" i="0" b="1" spc="306">
+              <a:rPr sz="1575" i="0" b="1" spc="472">
                 <a:solidFill>
                   <a:srgbClr val="BC5B36"/>
                 </a:solidFill>
@@ -4349,8 +4349,8 @@
         </p:nvSpPr>
         <p:spPr>
           <a:xfrm>
-            <a:off x="762000" y="3143250"/>
-            <a:ext cx="14401800" cy="963811"/>
+            <a:off x="762000" y="3086100"/>
+            <a:ext cx="14401800" cy="1139130"/>
           </a:xfrm>
           <a:prstGeom prst="rect">
             <a:avLst/>
@@ -4367,7 +4367,7 @@
               </a:lnSpc>
             </a:pPr>
             <a:r>
-              <a:rPr sz="8250" i="0" b="1" spc="-247">
+              <a:rPr sz="9750" i="0" b="1" spc="-292">
                 <a:solidFill>
                   <a:srgbClr val="1A1714"/>
                 </a:solidFill>
@@ -4388,8 +4388,8 @@
         </p:nvSpPr>
         <p:spPr>
           <a:xfrm>
-            <a:off x="-255240" y="4973836"/>
-            <a:ext cx="4841081" cy="1028700"/>
+            <a:off x="-251445" y="5301555"/>
+            <a:ext cx="4820841" cy="1285875"/>
           </a:xfrm>
           <a:prstGeom prst="rect">
             <a:avLst/>
@@ -4406,7 +4406,7 @@
               </a:lnSpc>
             </a:pPr>
             <a:r>
-              <a:rPr sz="9000" i="0" b="1" spc="-270">
+              <a:rPr sz="11250" i="0" b="1" spc="-337">
                 <a:solidFill>
                   <a:srgbClr val="1A1714"/>
                 </a:solidFill>
@@ -4427,8 +4427,8 @@
         </p:nvSpPr>
         <p:spPr>
           <a:xfrm>
-            <a:off x="-255240" y="6116836"/>
-            <a:ext cx="4841081" cy="104775"/>
+            <a:off x="-251445" y="6739830"/>
+            <a:ext cx="4820841" cy="200025"/>
           </a:xfrm>
           <a:prstGeom prst="rect">
             <a:avLst/>
@@ -4441,13 +4441,13 @@
           <a:p>
             <a:pPr algn="ctr"/>
             <a:r>
-              <a:rPr sz="750" i="0" b="0" spc="75">
+              <a:rPr sz="1350" i="0" b="1" spc="270">
                 <a:solidFill>
                   <a:srgbClr val="BC5B36"/>
                 </a:solidFill>
-                <a:latin typeface="Space Mono"/>
-                <a:ea typeface="Space Mono"/>
-                <a:cs typeface="Space Mono"/>
+                <a:latin typeface="Archivo"/>
+                <a:ea typeface="Archivo"/>
+                <a:cs typeface="Archivo"/>
               </a:rPr>
               <a:t>DAYS</a:t>
             </a:r>
@@ -4462,8 +4462,8 @@
         </p:nvSpPr>
         <p:spPr>
           <a:xfrm>
-            <a:off x="2722766" y="4973836"/>
-            <a:ext cx="4841319" cy="1028700"/>
+            <a:off x="2732961" y="5301555"/>
+            <a:ext cx="4821079" cy="1285875"/>
           </a:xfrm>
           <a:prstGeom prst="rect">
             <a:avLst/>
@@ -4480,7 +4480,7 @@
               </a:lnSpc>
             </a:pPr>
             <a:r>
-              <a:rPr sz="9000" i="0" b="1" spc="-270">
+              <a:rPr sz="11250" i="0" b="1" spc="-337">
                 <a:solidFill>
                   <a:srgbClr val="1A1714"/>
                 </a:solidFill>
@@ -4501,8 +4501,8 @@
         </p:nvSpPr>
         <p:spPr>
           <a:xfrm>
-            <a:off x="2722766" y="6116836"/>
-            <a:ext cx="4841319" cy="104775"/>
+            <a:off x="2732961" y="6739830"/>
+            <a:ext cx="4821079" cy="200025"/>
           </a:xfrm>
           <a:prstGeom prst="rect">
             <a:avLst/>
@@ -4515,13 +4515,13 @@
           <a:p>
             <a:pPr algn="ctr"/>
             <a:r>
-              <a:rPr sz="750" i="0" b="0" spc="75">
+              <a:rPr sz="1350" i="0" b="1" spc="270">
                 <a:solidFill>
                   <a:srgbClr val="BC5B36"/>
                 </a:solidFill>
-                <a:latin typeface="Space Mono"/>
-                <a:ea typeface="Space Mono"/>
-                <a:cs typeface="Space Mono"/>
+                <a:latin typeface="Archivo"/>
+                <a:ea typeface="Archivo"/>
+                <a:cs typeface="Archivo"/>
               </a:rPr>
               <a:t>HOURS</a:t>
             </a:r>
@@ -4536,8 +4536,8 @@
         </p:nvSpPr>
         <p:spPr>
           <a:xfrm>
-            <a:off x="5700966" y="4973836"/>
-            <a:ext cx="4841319" cy="1028700"/>
+            <a:off x="5717604" y="5301555"/>
+            <a:ext cx="4820841" cy="1285875"/>
           </a:xfrm>
           <a:prstGeom prst="rect">
             <a:avLst/>
@@ -4554,7 +4554,7 @@
               </a:lnSpc>
             </a:pPr>
             <a:r>
-              <a:rPr sz="9000" i="0" b="1" spc="-270">
+              <a:rPr sz="11250" i="0" b="1" spc="-337">
                 <a:solidFill>
                   <a:srgbClr val="1A1714"/>
                 </a:solidFill>
@@ -4575,8 +4575,8 @@
         </p:nvSpPr>
         <p:spPr>
           <a:xfrm>
-            <a:off x="5700966" y="6116836"/>
-            <a:ext cx="4841319" cy="104775"/>
+            <a:off x="5717604" y="6739830"/>
+            <a:ext cx="4820841" cy="200025"/>
           </a:xfrm>
           <a:prstGeom prst="rect">
             <a:avLst/>
@@ -4589,13 +4589,13 @@
           <a:p>
             <a:pPr algn="ctr"/>
             <a:r>
-              <a:rPr sz="750" i="0" b="0" spc="75">
+              <a:rPr sz="1350" i="0" b="1" spc="270">
                 <a:solidFill>
                   <a:srgbClr val="BC5B36"/>
                 </a:solidFill>
-                <a:latin typeface="Space Mono"/>
-                <a:ea typeface="Space Mono"/>
-                <a:cs typeface="Space Mono"/>
+                <a:latin typeface="Archivo"/>
+                <a:ea typeface="Archivo"/>
+                <a:cs typeface="Archivo"/>
               </a:rPr>
               <a:t>MINUTES</a:t>
             </a:r>
@@ -4610,8 +4610,8 @@
         </p:nvSpPr>
         <p:spPr>
           <a:xfrm>
-            <a:off x="762000" y="7421761"/>
-            <a:ext cx="14401800" cy="104775"/>
+            <a:off x="762000" y="8559105"/>
+            <a:ext cx="14401800" cy="190500"/>
           </a:xfrm>
           <a:prstGeom prst="rect">
             <a:avLst/>
@@ -4624,13 +4624,13 @@
           <a:p>
             <a:pPr algn="l"/>
             <a:r>
-              <a:rPr sz="750" i="0" b="0" spc="75">
+              <a:rPr sz="1275" i="0" b="1" spc="255">
                 <a:solidFill>
                   <a:srgbClr val="8A7E6F"/>
                 </a:solidFill>
-                <a:latin typeface="Space Mono"/>
-                <a:ea typeface="Space Mono"/>
-                <a:cs typeface="Space Mono"/>
+                <a:latin typeface="Archivo"/>
+                <a:ea typeface="Archivo"/>
+                <a:cs typeface="Archivo"/>
               </a:rPr>
               <a:t>THE STUDIO</a:t>
             </a:r>
@@ -4645,8 +4645,8 @@
         </p:nvSpPr>
         <p:spPr>
           <a:xfrm>
-            <a:off x="762000" y="7640836"/>
-            <a:ext cx="14401800" cy="385465"/>
+            <a:off x="762000" y="8902005"/>
+            <a:ext cx="14401800" cy="490686"/>
           </a:xfrm>
           <a:prstGeom prst="rect">
             <a:avLst/>
@@ -4663,7 +4663,7 @@
               </a:lnSpc>
             </a:pPr>
             <a:r>
-              <a:rPr sz="3300" i="1" b="0">
+              <a:rPr sz="4200" i="1" b="0">
                 <a:solidFill>
                   <a:srgbClr val="1A1714"/>
                 </a:solidFill>
@@ -4684,8 +4684,8 @@
         </p:nvSpPr>
         <p:spPr>
           <a:xfrm>
-            <a:off x="762000" y="8102501"/>
-            <a:ext cx="14401800" cy="171450"/>
+            <a:off x="762000" y="9506992"/>
+            <a:ext cx="14401800" cy="266700"/>
           </a:xfrm>
           <a:prstGeom prst="rect">
             <a:avLst/>
@@ -4698,7 +4698,7 @@
           <a:p>
             <a:pPr algn="l"/>
             <a:r>
-              <a:rPr sz="1200" i="0" b="0">
+              <a:rPr sz="1800" i="0" b="0">
                 <a:solidFill>
                   <a:srgbClr val="8A7E6F"/>
                 </a:solidFill>
@@ -4719,8 +4719,8 @@
         </p:nvSpPr>
         <p:spPr>
           <a:xfrm>
-            <a:off x="762000" y="8445401"/>
-            <a:ext cx="14401800" cy="245269"/>
+            <a:off x="762000" y="10002292"/>
+            <a:ext cx="14401800" cy="332929"/>
           </a:xfrm>
           <a:prstGeom prst="rect">
             <a:avLst/>
@@ -4737,7 +4737,7 @@
               </a:lnSpc>
             </a:pPr>
             <a:r>
-              <a:rPr sz="2100" i="1" b="0">
+              <a:rPr sz="2850" i="1" b="0">
                 <a:solidFill>
                   <a:srgbClr val="BC5B36"/>
                 </a:solidFill>
@@ -4758,8 +4758,8 @@
         </p:nvSpPr>
         <p:spPr>
           <a:xfrm>
-            <a:off x="1238250" y="15978188"/>
-            <a:ext cx="2532936" cy="161925"/>
+            <a:off x="1333500" y="16097250"/>
+            <a:ext cx="3589258" cy="257175"/>
           </a:xfrm>
           <a:prstGeom prst="rect">
             <a:avLst/>
@@ -4772,7 +4772,7 @@
           <a:p>
             <a:pPr algn="l"/>
             <a:r>
-              <a:rPr sz="1125" i="0" b="1" spc="135">
+              <a:rPr sz="1725" i="0" b="1" spc="172">
                 <a:solidFill>
                   <a:srgbClr val="1A1714"/>
                 </a:solidFill>
@@ -4793,8 +4793,8 @@
         </p:nvSpPr>
         <p:spPr>
           <a:xfrm>
-            <a:off x="9105900" y="15954375"/>
-            <a:ext cx="609600" cy="209550"/>
+            <a:off x="8982075" y="16078200"/>
+            <a:ext cx="716280" cy="295275"/>
           </a:xfrm>
           <a:prstGeom prst="rect">
             <a:avLst/>
@@ -4807,7 +4807,7 @@
           <a:p>
             <a:pPr algn="l"/>
             <a:r>
-              <a:rPr sz="1350" i="0" b="0">
+              <a:rPr sz="1950" i="0" b="0">
                 <a:solidFill>
                   <a:srgbClr val="BC5B36"/>
                 </a:solidFill>
@@ -4828,8 +4828,8 @@
         </p:nvSpPr>
         <p:spPr>
           <a:xfrm>
-            <a:off x="2801585" y="17297400"/>
-            <a:ext cx="4683681" cy="123825"/>
+            <a:off x="1823799" y="17192625"/>
+            <a:ext cx="6639401" cy="180975"/>
           </a:xfrm>
           <a:prstGeom prst="rect">
             <a:avLst/>
@@ -4842,7 +4842,7 @@
           <a:p>
             <a:pPr algn="ctr"/>
             <a:r>
-              <a:rPr sz="825" i="0" b="0" spc="165">
+              <a:rPr sz="1200" i="0" b="0" spc="240">
                 <a:solidFill>
                   <a:srgbClr val="8A7E6F"/>
                 </a:solidFill>

--- a/atelier/atelier-s03-open-studio-countdown.pptx
+++ b/atelier/atelier-s03-open-studio-countdown.pptx
@@ -3316,8 +3316,8 @@
         </p:nvSpPr>
         <p:spPr>
           <a:xfrm>
-            <a:off x="762000" y="4891980"/>
-            <a:ext cx="2793950" cy="2457450"/>
+            <a:off x="762000" y="4911030"/>
+            <a:ext cx="2793950" cy="2466975"/>
           </a:xfrm>
           <a:prstGeom prst="rect">
             <a:avLst/>
@@ -3360,7 +3360,7 @@
         </p:nvSpPr>
         <p:spPr>
           <a:xfrm>
-            <a:off x="762000" y="4891980"/>
+            <a:off x="762000" y="4911030"/>
             <a:ext cx="2793950" cy="9525"/>
           </a:xfrm>
           <a:prstGeom prst="rect">
@@ -3404,7 +3404,7 @@
         </p:nvSpPr>
         <p:spPr>
           <a:xfrm>
-            <a:off x="762000" y="7339905"/>
+            <a:off x="762000" y="7368480"/>
             <a:ext cx="2793950" cy="9525"/>
           </a:xfrm>
           <a:prstGeom prst="rect">
@@ -3448,8 +3448,8 @@
         </p:nvSpPr>
         <p:spPr>
           <a:xfrm>
-            <a:off x="762000" y="4891980"/>
-            <a:ext cx="9525" cy="2457450"/>
+            <a:off x="762000" y="4911030"/>
+            <a:ext cx="9525" cy="2466975"/>
           </a:xfrm>
           <a:prstGeom prst="rect">
             <a:avLst/>
@@ -3492,8 +3492,8 @@
         </p:nvSpPr>
         <p:spPr>
           <a:xfrm>
-            <a:off x="3546425" y="4891980"/>
-            <a:ext cx="9525" cy="2457450"/>
+            <a:off x="3546425" y="4911030"/>
+            <a:ext cx="9525" cy="2466975"/>
           </a:xfrm>
           <a:prstGeom prst="rect">
             <a:avLst/>
@@ -3536,8 +3536,8 @@
         </p:nvSpPr>
         <p:spPr>
           <a:xfrm>
-            <a:off x="3746450" y="4891980"/>
-            <a:ext cx="2794099" cy="2457450"/>
+            <a:off x="3746450" y="4911030"/>
+            <a:ext cx="2794099" cy="2466975"/>
           </a:xfrm>
           <a:prstGeom prst="rect">
             <a:avLst/>
@@ -3580,7 +3580,7 @@
         </p:nvSpPr>
         <p:spPr>
           <a:xfrm>
-            <a:off x="3746450" y="4891980"/>
+            <a:off x="3746450" y="4911030"/>
             <a:ext cx="2794099" cy="9525"/>
           </a:xfrm>
           <a:prstGeom prst="rect">
@@ -3624,7 +3624,7 @@
         </p:nvSpPr>
         <p:spPr>
           <a:xfrm>
-            <a:off x="3746450" y="7339905"/>
+            <a:off x="3746450" y="7368480"/>
             <a:ext cx="2794099" cy="9525"/>
           </a:xfrm>
           <a:prstGeom prst="rect">
@@ -3668,8 +3668,8 @@
         </p:nvSpPr>
         <p:spPr>
           <a:xfrm>
-            <a:off x="3746450" y="4891980"/>
-            <a:ext cx="9525" cy="2457450"/>
+            <a:off x="3746450" y="4911030"/>
+            <a:ext cx="9525" cy="2466975"/>
           </a:xfrm>
           <a:prstGeom prst="rect">
             <a:avLst/>
@@ -3712,8 +3712,8 @@
         </p:nvSpPr>
         <p:spPr>
           <a:xfrm>
-            <a:off x="6531025" y="4891980"/>
-            <a:ext cx="9525" cy="2457450"/>
+            <a:off x="6531025" y="4911030"/>
+            <a:ext cx="9525" cy="2466975"/>
           </a:xfrm>
           <a:prstGeom prst="rect">
             <a:avLst/>
@@ -3756,8 +3756,8 @@
         </p:nvSpPr>
         <p:spPr>
           <a:xfrm>
-            <a:off x="6731050" y="4891980"/>
-            <a:ext cx="2793950" cy="2457450"/>
+            <a:off x="6731050" y="4911030"/>
+            <a:ext cx="2793950" cy="2466975"/>
           </a:xfrm>
           <a:prstGeom prst="rect">
             <a:avLst/>
@@ -3800,7 +3800,7 @@
         </p:nvSpPr>
         <p:spPr>
           <a:xfrm>
-            <a:off x="6731050" y="4891980"/>
+            <a:off x="6731050" y="4911030"/>
             <a:ext cx="2793950" cy="9525"/>
           </a:xfrm>
           <a:prstGeom prst="rect">
@@ -3844,7 +3844,7 @@
         </p:nvSpPr>
         <p:spPr>
           <a:xfrm>
-            <a:off x="6731050" y="7339905"/>
+            <a:off x="6731050" y="7368480"/>
             <a:ext cx="2793950" cy="9525"/>
           </a:xfrm>
           <a:prstGeom prst="rect">
@@ -3888,8 +3888,8 @@
         </p:nvSpPr>
         <p:spPr>
           <a:xfrm>
-            <a:off x="6731050" y="4891980"/>
-            <a:ext cx="9525" cy="2457450"/>
+            <a:off x="6731050" y="4911030"/>
+            <a:ext cx="9525" cy="2466975"/>
           </a:xfrm>
           <a:prstGeom prst="rect">
             <a:avLst/>
@@ -3932,8 +3932,8 @@
         </p:nvSpPr>
         <p:spPr>
           <a:xfrm>
-            <a:off x="9515475" y="4891980"/>
-            <a:ext cx="9525" cy="2457450"/>
+            <a:off x="9515475" y="4911030"/>
+            <a:ext cx="9525" cy="2466975"/>
           </a:xfrm>
           <a:prstGeom prst="rect">
             <a:avLst/>
@@ -3976,7 +3976,7 @@
         </p:nvSpPr>
         <p:spPr>
           <a:xfrm>
-            <a:off x="762000" y="8111430"/>
+            <a:off x="762000" y="8140005"/>
             <a:ext cx="8763000" cy="9525"/>
           </a:xfrm>
           <a:prstGeom prst="rect">
@@ -4279,8 +4279,8 @@
         </p:nvSpPr>
         <p:spPr>
           <a:xfrm>
-            <a:off x="7129611" y="952500"/>
-            <a:ext cx="4213622" cy="171450"/>
+            <a:off x="6570464" y="933450"/>
+            <a:ext cx="5108258" cy="209550"/>
           </a:xfrm>
           <a:prstGeom prst="rect">
             <a:avLst/>
@@ -4293,7 +4293,7 @@
           <a:p>
             <a:pPr algn="l"/>
             <a:r>
-              <a:rPr sz="1125" i="0" b="0" spc="180">
+              <a:rPr sz="1425" i="0" b="0" spc="199">
                 <a:solidFill>
                   <a:srgbClr val="8A7E6F"/>
                 </a:solidFill>
@@ -4315,7 +4315,7 @@
         <p:spPr>
           <a:xfrm>
             <a:off x="762000" y="2667000"/>
-            <a:ext cx="14401800" cy="228600"/>
+            <a:ext cx="14401800" cy="247650"/>
           </a:xfrm>
           <a:prstGeom prst="rect">
             <a:avLst/>
@@ -4328,7 +4328,7 @@
           <a:p>
             <a:pPr algn="l"/>
             <a:r>
-              <a:rPr sz="1575" i="0" b="1" spc="472">
+              <a:rPr sz="1650" i="0" b="1" spc="495">
                 <a:solidFill>
                   <a:srgbClr val="BC5B36"/>
                 </a:solidFill>
@@ -4349,7 +4349,7 @@
         </p:nvSpPr>
         <p:spPr>
           <a:xfrm>
-            <a:off x="762000" y="3086100"/>
+            <a:off x="762000" y="3105150"/>
             <a:ext cx="14401800" cy="1139130"/>
           </a:xfrm>
           <a:prstGeom prst="rect">
@@ -4388,7 +4388,7 @@
         </p:nvSpPr>
         <p:spPr>
           <a:xfrm>
-            <a:off x="-251445" y="5301555"/>
+            <a:off x="-251445" y="5320605"/>
             <a:ext cx="4820841" cy="1285875"/>
           </a:xfrm>
           <a:prstGeom prst="rect">
@@ -4427,8 +4427,8 @@
         </p:nvSpPr>
         <p:spPr>
           <a:xfrm>
-            <a:off x="-251445" y="6739830"/>
-            <a:ext cx="4820841" cy="200025"/>
+            <a:off x="-251445" y="6758880"/>
+            <a:ext cx="4820841" cy="209550"/>
           </a:xfrm>
           <a:prstGeom prst="rect">
             <a:avLst/>
@@ -4441,7 +4441,7 @@
           <a:p>
             <a:pPr algn="ctr"/>
             <a:r>
-              <a:rPr sz="1350" i="0" b="1" spc="270">
+              <a:rPr sz="1425" i="0" b="1" spc="256">
                 <a:solidFill>
                   <a:srgbClr val="BC5B36"/>
                 </a:solidFill>
@@ -4462,7 +4462,7 @@
         </p:nvSpPr>
         <p:spPr>
           <a:xfrm>
-            <a:off x="2732961" y="5301555"/>
+            <a:off x="2732961" y="5320605"/>
             <a:ext cx="4821079" cy="1285875"/>
           </a:xfrm>
           <a:prstGeom prst="rect">
@@ -4501,8 +4501,8 @@
         </p:nvSpPr>
         <p:spPr>
           <a:xfrm>
-            <a:off x="2732961" y="6739830"/>
-            <a:ext cx="4821079" cy="200025"/>
+            <a:off x="2732961" y="6758880"/>
+            <a:ext cx="4821079" cy="209550"/>
           </a:xfrm>
           <a:prstGeom prst="rect">
             <a:avLst/>
@@ -4515,7 +4515,7 @@
           <a:p>
             <a:pPr algn="ctr"/>
             <a:r>
-              <a:rPr sz="1350" i="0" b="1" spc="270">
+              <a:rPr sz="1425" i="0" b="1" spc="256">
                 <a:solidFill>
                   <a:srgbClr val="BC5B36"/>
                 </a:solidFill>
@@ -4536,7 +4536,7 @@
         </p:nvSpPr>
         <p:spPr>
           <a:xfrm>
-            <a:off x="5717604" y="5301555"/>
+            <a:off x="5717604" y="5320605"/>
             <a:ext cx="4820841" cy="1285875"/>
           </a:xfrm>
           <a:prstGeom prst="rect">
@@ -4575,8 +4575,8 @@
         </p:nvSpPr>
         <p:spPr>
           <a:xfrm>
-            <a:off x="5717604" y="6739830"/>
-            <a:ext cx="4820841" cy="200025"/>
+            <a:off x="5717604" y="6758880"/>
+            <a:ext cx="4820841" cy="209550"/>
           </a:xfrm>
           <a:prstGeom prst="rect">
             <a:avLst/>
@@ -4589,7 +4589,7 @@
           <a:p>
             <a:pPr algn="ctr"/>
             <a:r>
-              <a:rPr sz="1350" i="0" b="1" spc="270">
+              <a:rPr sz="1425" i="0" b="1" spc="256">
                 <a:solidFill>
                   <a:srgbClr val="BC5B36"/>
                 </a:solidFill>
@@ -4610,8 +4610,8 @@
         </p:nvSpPr>
         <p:spPr>
           <a:xfrm>
-            <a:off x="762000" y="8559105"/>
-            <a:ext cx="14401800" cy="190500"/>
+            <a:off x="762000" y="8587680"/>
+            <a:ext cx="14401800" cy="209550"/>
           </a:xfrm>
           <a:prstGeom prst="rect">
             <a:avLst/>
@@ -4624,7 +4624,7 @@
           <a:p>
             <a:pPr algn="l"/>
             <a:r>
-              <a:rPr sz="1275" i="0" b="1" spc="255">
+              <a:rPr sz="1425" i="0" b="1" spc="256">
                 <a:solidFill>
                   <a:srgbClr val="8A7E6F"/>
                 </a:solidFill>
@@ -4645,7 +4645,7 @@
         </p:nvSpPr>
         <p:spPr>
           <a:xfrm>
-            <a:off x="762000" y="8902005"/>
+            <a:off x="762000" y="8949630"/>
             <a:ext cx="14401800" cy="490686"/>
           </a:xfrm>
           <a:prstGeom prst="rect">
@@ -4684,7 +4684,7 @@
         </p:nvSpPr>
         <p:spPr>
           <a:xfrm>
-            <a:off x="762000" y="9506992"/>
+            <a:off x="762000" y="9554617"/>
             <a:ext cx="14401800" cy="266700"/>
           </a:xfrm>
           <a:prstGeom prst="rect">
@@ -4719,7 +4719,7 @@
         </p:nvSpPr>
         <p:spPr>
           <a:xfrm>
-            <a:off x="762000" y="10002292"/>
+            <a:off x="762000" y="10049917"/>
             <a:ext cx="14401800" cy="332929"/>
           </a:xfrm>
           <a:prstGeom prst="rect">
@@ -4758,8 +4758,8 @@
         </p:nvSpPr>
         <p:spPr>
           <a:xfrm>
-            <a:off x="1333500" y="16097250"/>
-            <a:ext cx="3589258" cy="257175"/>
+            <a:off x="1333500" y="16078200"/>
+            <a:ext cx="4040267" cy="295275"/>
           </a:xfrm>
           <a:prstGeom prst="rect">
             <a:avLst/>
@@ -4772,7 +4772,7 @@
           <a:p>
             <a:pPr algn="l"/>
             <a:r>
-              <a:rPr sz="1725" i="0" b="1" spc="172">
+              <a:rPr sz="2025" i="0" b="1" spc="162">
                 <a:solidFill>
                   <a:srgbClr val="1A1714"/>
                 </a:solidFill>
@@ -4828,8 +4828,8 @@
         </p:nvSpPr>
         <p:spPr>
           <a:xfrm>
-            <a:off x="1823799" y="17192625"/>
-            <a:ext cx="6639401" cy="180975"/>
+            <a:off x="1329690" y="17164050"/>
+            <a:ext cx="7627620" cy="209550"/>
           </a:xfrm>
           <a:prstGeom prst="rect">
             <a:avLst/>
@@ -4842,7 +4842,7 @@
           <a:p>
             <a:pPr algn="ctr"/>
             <a:r>
-              <a:rPr sz="1200" i="0" b="0" spc="240">
+              <a:rPr sz="1425" i="0" b="0" spc="256">
                 <a:solidFill>
                   <a:srgbClr val="8A7E6F"/>
                 </a:solidFill>
